--- a/Poster/Poster_Presentation.pptx
+++ b/Poster/Poster_Presentation.pptx
@@ -8914,10 +8914,16 @@
                         <m:t>𝑝𝑒𝑜𝑝𝑙𝑒</m:t>
                       </m:r>
                       <m:r>
+                        <a:rPr lang="en-IE" sz="1299" i="1" smtClean="0">
+                          <a:latin typeface="Cambria Math" panose="02040503050406030204" pitchFamily="18" charset="0"/>
+                        </a:rPr>
+                        <m:t>=</m:t>
+                      </m:r>
+                      <m:r>
                         <a:rPr lang="en-IE" sz="1299" i="1">
                           <a:latin typeface="Cambria Math" panose="02040503050406030204" pitchFamily="18" charset="0"/>
                         </a:rPr>
-                        <m:t>= </m:t>
+                        <m:t> </m:t>
                       </m:r>
                       <m:f>
                         <m:fPr>
